--- a/day2/Day2_MiniZinc_Slides.pptx
+++ b/day2/Day2_MiniZinc_Slides.pptx
@@ -9454,45 +9454,6 @@
       </p:sp>
       <p:sp>
         <p:nvSpPr>
-          <p:cNvPr id="12" name="Text 10"/>
-          <p:cNvSpPr/>
-          <p:nvPr/>
-        </p:nvSpPr>
-        <p:spPr>
-          <a:xfrm>
-            <a:off x="4005072" y="2514600"/>
-            <a:ext cx="4663440" cy="384048"/>
-          </a:xfrm>
-          <a:prstGeom prst="rect">
-            <a:avLst/>
-          </a:prstGeom>
-          <a:noFill/>
-          <a:ln/>
-        </p:spPr>
-        <p:txBody>
-          <a:bodyPr wrap="square" rtlCol="0" anchor="ctr"/>
-          <a:lstStyle/>
-          <a:p>
-            <a:pPr marL="0" indent="0">
-              <a:buNone/>
-            </a:pPr>
-            <a:r>
-              <a:rPr lang="en-US" sz="1050" dirty="0">
-                <a:solidFill>
-                  <a:srgbClr val="2D3748"/>
-                </a:solidFill>
-                <a:latin typeface="Consolas" pitchFamily="34" charset="0"/>
-                <a:ea typeface="Consolas" pitchFamily="34" charset="-122"/>
-                <a:cs typeface="Consolas" pitchFamily="34" charset="-120"/>
-              </a:rPr>
-              <a:t>if l not in allowed[p] then produce[p,l] = 0 endif</a:t>
-            </a:r>
-            <a:endParaRPr lang="en-US" sz="1050" dirty="0"/>
-          </a:p>
-        </p:txBody>
-      </p:sp>
-      <p:sp>
-        <p:nvSpPr>
           <p:cNvPr id="13" name="Shape 11"/>
           <p:cNvSpPr/>
           <p:nvPr/>
@@ -9625,45 +9586,6 @@
       </p:sp>
       <p:sp>
         <p:nvSpPr>
-          <p:cNvPr id="17" name="Text 15"/>
-          <p:cNvSpPr/>
-          <p:nvPr/>
-        </p:nvSpPr>
-        <p:spPr>
-          <a:xfrm>
-            <a:off x="4005072" y="2953512"/>
-            <a:ext cx="4663440" cy="384048"/>
-          </a:xfrm>
-          <a:prstGeom prst="rect">
-            <a:avLst/>
-          </a:prstGeom>
-          <a:noFill/>
-          <a:ln/>
-        </p:spPr>
-        <p:txBody>
-          <a:bodyPr wrap="square" rtlCol="0" anchor="ctr"/>
-          <a:lstStyle/>
-          <a:p>
-            <a:pPr marL="0" indent="0">
-              <a:buNone/>
-            </a:pPr>
-            <a:r>
-              <a:rPr lang="en-US" sz="1050" dirty="0">
-                <a:solidFill>
-                  <a:srgbClr val="2D3748"/>
-                </a:solidFill>
-                <a:latin typeface="Consolas" pitchFamily="34" charset="0"/>
-                <a:ea typeface="Consolas" pitchFamily="34" charset="-122"/>
-                <a:cs typeface="Consolas" pitchFamily="34" charset="-120"/>
-              </a:rPr>
-              <a:t>forall(l in LINES)( sum(p in PRODUCTS)(produce[p,l]) &lt;= line_capacity[l] )</a:t>
-            </a:r>
-            <a:endParaRPr lang="en-US" sz="1050" dirty="0"/>
-          </a:p>
-        </p:txBody>
-      </p:sp>
-      <p:sp>
-        <p:nvSpPr>
           <p:cNvPr id="18" name="Shape 16"/>
           <p:cNvSpPr/>
           <p:nvPr/>
@@ -9796,45 +9718,6 @@
       </p:sp>
       <p:sp>
         <p:nvSpPr>
-          <p:cNvPr id="22" name="Text 20"/>
-          <p:cNvSpPr/>
-          <p:nvPr/>
-        </p:nvSpPr>
-        <p:spPr>
-          <a:xfrm>
-            <a:off x="4005072" y="3392424"/>
-            <a:ext cx="4663440" cy="384048"/>
-          </a:xfrm>
-          <a:prstGeom prst="rect">
-            <a:avLst/>
-          </a:prstGeom>
-          <a:noFill/>
-          <a:ln/>
-        </p:spPr>
-        <p:txBody>
-          <a:bodyPr wrap="square" rtlCol="0" anchor="ctr"/>
-          <a:lstStyle/>
-          <a:p>
-            <a:pPr marL="0" indent="0">
-              <a:buNone/>
-            </a:pPr>
-            <a:r>
-              <a:rPr lang="en-US" sz="1050" dirty="0">
-                <a:solidFill>
-                  <a:srgbClr val="2D3748"/>
-                </a:solidFill>
-                <a:latin typeface="Consolas" pitchFamily="34" charset="0"/>
-                <a:ea typeface="Consolas" pitchFamily="34" charset="-122"/>
-                <a:cs typeface="Consolas" pitchFamily="34" charset="-120"/>
-              </a:rPr>
-              <a:t>total_cost คำนวณไว้แล้ว = sum(p,l)(unit_cost[p,l] * produce[p,l])</a:t>
-            </a:r>
-            <a:endParaRPr lang="en-US" sz="1050" dirty="0"/>
-          </a:p>
-        </p:txBody>
-      </p:sp>
-      <p:sp>
-        <p:nvSpPr>
           <p:cNvPr id="23" name="Shape 21"/>
           <p:cNvSpPr/>
           <p:nvPr/>
@@ -10133,45 +10016,6 @@
               <a:t>(ท้าทาย) ห้ามใช้ Line2+Line3 พร้อมกัน: </a:t>
             </a:r>
             <a:endParaRPr lang="en-US" sz="1150" dirty="0"/>
-          </a:p>
-        </p:txBody>
-      </p:sp>
-      <p:sp>
-        <p:nvSpPr>
-          <p:cNvPr id="32" name="Text 30"/>
-          <p:cNvSpPr/>
-          <p:nvPr/>
-        </p:nvSpPr>
-        <p:spPr>
-          <a:xfrm>
-            <a:off x="4005072" y="4270248"/>
-            <a:ext cx="4663440" cy="384048"/>
-          </a:xfrm>
-          <a:prstGeom prst="rect">
-            <a:avLst/>
-          </a:prstGeom>
-          <a:noFill/>
-          <a:ln/>
-        </p:spPr>
-        <p:txBody>
-          <a:bodyPr wrap="square" rtlCol="0" anchor="ctr"/>
-          <a:lstStyle/>
-          <a:p>
-            <a:pPr marL="0" indent="0">
-              <a:buNone/>
-            </a:pPr>
-            <a:r>
-              <a:rPr lang="en-US" sz="1050" dirty="0">
-                <a:solidFill>
-                  <a:srgbClr val="2D3748"/>
-                </a:solidFill>
-                <a:latin typeface="Consolas" pitchFamily="34" charset="0"/>
-                <a:ea typeface="Consolas" pitchFamily="34" charset="-122"/>
-                <a:cs typeface="Consolas" pitchFamily="34" charset="-120"/>
-              </a:rPr>
-              <a:t>constraint sum(p)(produce[p,Line2]) = 0 \/ sum(p)(produce[p,Line3]) = 0</a:t>
-            </a:r>
-            <a:endParaRPr lang="en-US" sz="1050" dirty="0"/>
           </a:p>
         </p:txBody>
       </p:sp>
@@ -22203,7 +22047,7 @@
                 <a:ea typeface="Calibri" pitchFamily="34" charset="-122"/>
                 <a:cs typeface="Calibri" pitchFamily="34" charset="-120"/>
               </a:rPr>
-              <a:t>เติม forall(r in RESOURCES)( sum(...) &lt;= capacity[r] ) แทน TODO</a:t>
+              <a:t>เติม forall(r in RESOURCES)( … ) แทน TODO</a:t>
             </a:r>
             <a:endParaRPr lang="en-US" sz="1100" dirty="0"/>
           </a:p>
@@ -22381,7 +22225,7 @@
                 <a:ea typeface="Calibri" pitchFamily="34" charset="-122"/>
                 <a:cs typeface="Calibri" pitchFamily="34" charset="-120"/>
               </a:rPr>
-              <a:t>เติม solve maximize sum(p in PRODUCTS)(profit[p] * produce[p]);</a:t>
+              <a:t>เติม solve maximize … ;</a:t>
             </a:r>
             <a:endParaRPr lang="en-US" sz="1100" dirty="0"/>
           </a:p>
